--- a/BACKUP&RECOVERY/12장/12장_ARCHIVELOG_복구_복합장애_종합.pptx
+++ b/BACKUP&RECOVERY/12장/12장_ARCHIVELOG_복구_복합장애_종합.pptx
@@ -6445,7 +6445,7 @@
                 <a:latin typeface="Consolas"/>
                 <a:ea typeface="Consolas"/>
               </a:rPr>
-              <a:t>                 /u01/app/oracle/oradata/ORCL/control01.ctl</a:t>
+              <a:t>                 /u01/app/oracle/oradata/orcl/control01.ctl</a:t>
             </a:r>
           </a:p>
           <a:p>
@@ -6581,7 +6581,7 @@
                 <a:latin typeface="Consolas"/>
                 <a:ea typeface="Consolas"/>
               </a:rPr>
-              <a:t>SYS@orcl&gt; !cp -p /home/oracle/backup/ch12/*.dbf /u02/oradata/ORCL/</a:t>
+              <a:t>SYS@orcl&gt; !cp -p /home/oracle/backup/ch12/*.dbf /u02/oradata/orcl/</a:t>
             </a:r>
           </a:p>
           <a:p>
@@ -6985,7 +6985,7 @@
                 <a:latin typeface="Consolas"/>
                 <a:ea typeface="Consolas"/>
               </a:rPr>
-              <a:t>SYS@orcl&gt; !ls -l /u02/oradata/ORCL/*.dbf | wc -l</a:t>
+              <a:t>SYS@orcl&gt; !ls -l /u01/app/oracle/oradata/orcl/*.dbf | wc -l</a:t>
             </a:r>
           </a:p>
           <a:p>
@@ -7053,7 +7053,7 @@
                 <a:latin typeface="Consolas"/>
                 <a:ea typeface="Consolas"/>
               </a:rPr>
-              <a:t>SYS@orcl&gt; !cp -p /home/oracle/backup/ch12/system01.dbf /u02/oradata/ORCL/</a:t>
+              <a:t>SYS@orcl&gt; !cp -p /home/oracle/backup/ch12/system01.dbf /u02/oradata/orcl/</a:t>
             </a:r>
           </a:p>
           <a:p>
@@ -8572,7 +8572,7 @@
                 <a:latin typeface="Consolas"/>
                 <a:ea typeface="Consolas"/>
               </a:rPr>
-              <a:t>ORA-00312: online log 4 thread 1: '/u01/app/oracle/oradata/ORCL/redo04.log'</a:t>
+              <a:t>ORA-00312: online log 4 thread 1: '/u01/app/oracle/oradata/orcl/redo04.log'</a:t>
             </a:r>
           </a:p>
           <a:p>
@@ -8742,7 +8742,7 @@
                 <a:latin typeface="Consolas"/>
                 <a:ea typeface="Consolas"/>
               </a:rPr>
-              <a:t>         4 /u01/app/oracle/oradata/ORCL/redo04.log      INVALID</a:t>
+              <a:t>         4 /u01/app/oracle/oradata/orcl/redo04.log      INVALID</a:t>
             </a:r>
           </a:p>
         </p:txBody>
@@ -9234,7 +9234,7 @@
                 <a:latin typeface="Consolas"/>
                 <a:ea typeface="Consolas"/>
               </a:rPr>
-              <a:t>SYS@orcl&gt; !cp -p /home/oracle/backup/ch12/*.dbf /u02/oradata/ORCL/</a:t>
+              <a:t>SYS@orcl&gt; !cp -p /home/oracle/backup/ch12/*.dbf /u02/oradata/orcl/</a:t>
             </a:r>
           </a:p>
           <a:p>
@@ -10900,7 +10900,7 @@
                 <a:latin typeface="Consolas"/>
                 <a:ea typeface="Consolas"/>
               </a:rPr>
-              <a:t>18402:CREATE TABLESPACE tbs01 DATAFILE '/u02/oradata/ORCL/tbs01.dbf' SIZE 20M</a:t>
+              <a:t>18402:CREATE TABLESPACE tbs01 DATAFILE '/u01/app/oracle/oradata/orcl/tbs01.dbf' SIZE 20M</a:t>
             </a:r>
           </a:p>
           <a:p>
@@ -11287,7 +11287,7 @@
                 <a:latin typeface="Consolas"/>
                 <a:ea typeface="Consolas"/>
               </a:rPr>
-              <a:t>[oracle@oel7v9r1 ~]$ cp -p /u02/oradata/ORCL/*.dbf $D/ 2&gt;/dev/null</a:t>
+              <a:t>[oracle@oel7v9r1 ~]$ cp -p /u01/app/oracle/oradata/orcl/*.dbf $D/ 2&gt;/dev/null</a:t>
             </a:r>
           </a:p>
           <a:p>
@@ -11304,7 +11304,7 @@
                 <a:latin typeface="Consolas"/>
                 <a:ea typeface="Consolas"/>
               </a:rPr>
-              <a:t>[oracle@oel7v9r1 ~]$ cp -p /u01/app/oracle/oradata/ORCL/*.log $D/ 2&gt;/dev/null</a:t>
+              <a:t>[oracle@oel7v9r1 ~]$ cp -p /u01/app/oracle/oradata/orcl/*.log $D/ 2&gt;/dev/null</a:t>
             </a:r>
           </a:p>
           <a:p>
@@ -11321,7 +11321,7 @@
                 <a:latin typeface="Consolas"/>
                 <a:ea typeface="Consolas"/>
               </a:rPr>
-              <a:t>[oracle@oel7v9r1 ~]$ cp -p /u02/oradata/ORCL/*.log $D/ 2&gt;/dev/null</a:t>
+              <a:t>[oracle@oel7v9r1 ~]$ cp -p /u02/oradata/orcl/*.log $D/ 2&gt;/dev/null</a:t>
             </a:r>
           </a:p>
           <a:p>
@@ -11338,7 +11338,7 @@
                 <a:latin typeface="Consolas"/>
                 <a:ea typeface="Consolas"/>
               </a:rPr>
-              <a:t>[oracle@oel7v9r1 ~]$ cp -p /u01/app/oracle/oradata/ORCL/*.ctl $D/ 2&gt;/dev/null</a:t>
+              <a:t>[oracle@oel7v9r1 ~]$ cp -p /u01/app/oracle/oradata/orcl/*.ctl $D/ 2&gt;/dev/null</a:t>
             </a:r>
           </a:p>
           <a:p>
@@ -17491,7 +17491,7 @@
                 <a:latin typeface="Consolas"/>
                 <a:ea typeface="Consolas"/>
               </a:rPr>
-              <a:t>SYS@orcl&gt; !ls -l /u02/oradata/ORCL/</a:t>
+              <a:t>SYS@orcl&gt; !ls -l /u02/oradata/orcl/</a:t>
             </a:r>
           </a:p>
           <a:p>
